--- a/Presentation/Decoherence.pptx
+++ b/Presentation/Decoherence.pptx
@@ -5,13 +5,12 @@
     <p:sldMasterId id="2147483648" r:id="rId1"/>
   </p:sldMasterIdLst>
   <p:notesMasterIdLst>
-    <p:notesMasterId r:id="rId6"/>
+    <p:notesMasterId r:id="rId5"/>
   </p:notesMasterIdLst>
   <p:sldIdLst>
     <p:sldId id="263" r:id="rId2"/>
-    <p:sldId id="264" r:id="rId3"/>
-    <p:sldId id="265" r:id="rId4"/>
-    <p:sldId id="266" r:id="rId5"/>
+    <p:sldId id="265" r:id="rId3"/>
+    <p:sldId id="266" r:id="rId4"/>
   </p:sldIdLst>
   <p:sldSz cx="12192000" cy="6858000"/>
   <p:notesSz cx="6858000" cy="9144000"/>
@@ -3799,10 +3798,10 @@
       </p:grpSpPr>
       <p:pic>
         <p:nvPicPr>
-          <p:cNvPr id="3" name="Picture 2">
-            <a:extLst>
-              <a:ext uri="{FF2B5EF4-FFF2-40B4-BE49-F238E27FC236}">
-                <a16:creationId xmlns:a16="http://schemas.microsoft.com/office/drawing/2014/main" id="{EE664448-31E2-86C2-1F92-D7B7AE1CE7FE}"/>
+          <p:cNvPr id="5" name="Picture 4">
+            <a:extLst>
+              <a:ext uri="{FF2B5EF4-FFF2-40B4-BE49-F238E27FC236}">
+                <a16:creationId xmlns:a16="http://schemas.microsoft.com/office/drawing/2014/main" id="{565970F3-E2E5-1990-7A67-8CE38DAB4CAB}"/>
               </a:ext>
             </a:extLst>
           </p:cNvPr>
@@ -3819,20 +3818,78 @@
         </p:blipFill>
         <p:spPr>
           <a:xfrm>
-            <a:off x="7244638" y="3844669"/>
-            <a:ext cx="3789892" cy="2743200"/>
+            <a:off x="7193500" y="3954426"/>
+            <a:ext cx="3303037" cy="2743200"/>
           </a:xfrm>
           <a:prstGeom prst="rect">
             <a:avLst/>
           </a:prstGeom>
         </p:spPr>
       </p:pic>
+      <p:sp>
+        <p:nvSpPr>
+          <p:cNvPr id="6" name="Title 1">
+            <a:extLst>
+              <a:ext uri="{FF2B5EF4-FFF2-40B4-BE49-F238E27FC236}">
+                <a16:creationId xmlns:a16="http://schemas.microsoft.com/office/drawing/2014/main" id="{A22A1129-C074-8D71-19F4-E5CE9BBC9913}"/>
+              </a:ext>
+            </a:extLst>
+          </p:cNvPr>
+          <p:cNvSpPr txBox="1">
+            <a:spLocks/>
+          </p:cNvSpPr>
+          <p:nvPr/>
+        </p:nvSpPr>
+        <p:spPr>
+          <a:xfrm>
+            <a:off x="1036712" y="153459"/>
+            <a:ext cx="4343673" cy="568996"/>
+          </a:xfrm>
+          <a:prstGeom prst="rect">
+            <a:avLst/>
+          </a:prstGeom>
+        </p:spPr>
+        <p:txBody>
+          <a:bodyPr vert="horz" lIns="91440" tIns="45720" rIns="91440" bIns="45720" rtlCol="0" anchor="ctr">
+            <a:normAutofit/>
+          </a:bodyPr>
+          <a:lstStyle>
+            <a:lvl1pPr algn="l" defTabSz="914400" rtl="0" eaLnBrk="1" latinLnBrk="0" hangingPunct="1">
+              <a:lnSpc>
+                <a:spcPct val="90000"/>
+              </a:lnSpc>
+              <a:spcBef>
+                <a:spcPct val="0"/>
+              </a:spcBef>
+              <a:buNone/>
+              <a:defRPr sz="4400" kern="1200">
+                <a:solidFill>
+                  <a:schemeClr val="tx1"/>
+                </a:solidFill>
+                <a:latin typeface="+mj-lt"/>
+                <a:ea typeface="+mj-ea"/>
+                <a:cs typeface="+mj-cs"/>
+              </a:defRPr>
+            </a:lvl1pPr>
+          </a:lstStyle>
+          <a:p>
+            <a:pPr algn="ctr"/>
+            <a:r>
+              <a:rPr lang="en-US" sz="2400" b="1" dirty="0">
+                <a:latin typeface="Arial" panose="020B0604020202020204" pitchFamily="34" charset="0"/>
+                <a:cs typeface="Arial" panose="020B0604020202020204" pitchFamily="34" charset="0"/>
+              </a:rPr>
+              <a:t>System-controlled encoding</a:t>
+            </a:r>
+          </a:p>
+        </p:txBody>
+      </p:sp>
       <p:pic>
         <p:nvPicPr>
-          <p:cNvPr id="5" name="Picture 4">
-            <a:extLst>
-              <a:ext uri="{FF2B5EF4-FFF2-40B4-BE49-F238E27FC236}">
-                <a16:creationId xmlns:a16="http://schemas.microsoft.com/office/drawing/2014/main" id="{4C1F8EF2-B825-B018-14A8-4A8627A3AAFB}"/>
+          <p:cNvPr id="8" name="Picture 7">
+            <a:extLst>
+              <a:ext uri="{FF2B5EF4-FFF2-40B4-BE49-F238E27FC236}">
+                <a16:creationId xmlns:a16="http://schemas.microsoft.com/office/drawing/2014/main" id="{9CBA05A2-7E13-1767-260E-1BA220784CE8}"/>
               </a:ext>
             </a:extLst>
           </p:cNvPr>
@@ -3849,8 +3906,8 @@
         </p:blipFill>
         <p:spPr>
           <a:xfrm>
-            <a:off x="752218" y="1004034"/>
-            <a:ext cx="4139485" cy="2743200"/>
+            <a:off x="7193500" y="685800"/>
+            <a:ext cx="3194683" cy="2743200"/>
           </a:xfrm>
           <a:prstGeom prst="rect">
             <a:avLst/>
@@ -3859,10 +3916,10 @@
       </p:pic>
       <p:pic>
         <p:nvPicPr>
-          <p:cNvPr id="8" name="Picture 7">
-            <a:extLst>
-              <a:ext uri="{FF2B5EF4-FFF2-40B4-BE49-F238E27FC236}">
-                <a16:creationId xmlns:a16="http://schemas.microsoft.com/office/drawing/2014/main" id="{A5F27E8F-0BFB-0E89-0C40-CD333FAF8616}"/>
+          <p:cNvPr id="9" name="Picture 8">
+            <a:extLst>
+              <a:ext uri="{FF2B5EF4-FFF2-40B4-BE49-F238E27FC236}">
+                <a16:creationId xmlns:a16="http://schemas.microsoft.com/office/drawing/2014/main" id="{FFA459B7-5EDC-3429-04C9-8C3468CA2257}"/>
               </a:ext>
             </a:extLst>
           </p:cNvPr>
@@ -3879,7 +3936,7 @@
         </p:blipFill>
         <p:spPr>
           <a:xfrm>
-            <a:off x="7069841" y="1004188"/>
+            <a:off x="471947" y="817607"/>
             <a:ext cx="4139485" cy="2743200"/>
           </a:xfrm>
           <a:prstGeom prst="rect">
@@ -3892,7 +3949,7 @@
           <p:cNvPr id="10" name="Picture 9">
             <a:extLst>
               <a:ext uri="{FF2B5EF4-FFF2-40B4-BE49-F238E27FC236}">
-                <a16:creationId xmlns:a16="http://schemas.microsoft.com/office/drawing/2014/main" id="{868F9BC2-59C6-786B-E487-34CA51959BDC}"/>
+                <a16:creationId xmlns:a16="http://schemas.microsoft.com/office/drawing/2014/main" id="{F8ED941C-BBAC-1E50-E4BF-98AD3BF246BB}"/>
               </a:ext>
             </a:extLst>
           </p:cNvPr>
@@ -3909,7 +3966,7 @@
         </p:blipFill>
         <p:spPr>
           <a:xfrm>
-            <a:off x="1565988" y="3844669"/>
+            <a:off x="1459971" y="3594834"/>
             <a:ext cx="3381375" cy="2743200"/>
           </a:xfrm>
           <a:prstGeom prst="rect">
@@ -3917,164 +3974,10 @@
           </a:prstGeom>
         </p:spPr>
       </p:pic>
-      <p:sp>
-        <p:nvSpPr>
-          <p:cNvPr id="11" name="Title 1">
-            <a:extLst>
-              <a:ext uri="{FF2B5EF4-FFF2-40B4-BE49-F238E27FC236}">
-                <a16:creationId xmlns:a16="http://schemas.microsoft.com/office/drawing/2014/main" id="{BBDEDBEE-B0FF-306C-29F3-746B7BC0AD9A}"/>
-              </a:ext>
-            </a:extLst>
-          </p:cNvPr>
-          <p:cNvSpPr txBox="1">
-            <a:spLocks/>
-          </p:cNvSpPr>
-          <p:nvPr/>
-        </p:nvSpPr>
-        <p:spPr>
-          <a:xfrm>
-            <a:off x="1464365" y="386321"/>
-            <a:ext cx="4343673" cy="568996"/>
-          </a:xfrm>
-          <a:prstGeom prst="rect">
-            <a:avLst/>
-          </a:prstGeom>
-        </p:spPr>
-        <p:txBody>
-          <a:bodyPr vert="horz" lIns="91440" tIns="45720" rIns="91440" bIns="45720" rtlCol="0" anchor="ctr">
-            <a:normAutofit/>
-          </a:bodyPr>
-          <a:lstStyle>
-            <a:lvl1pPr algn="l" defTabSz="914400" rtl="0" eaLnBrk="1" latinLnBrk="0" hangingPunct="1">
-              <a:lnSpc>
-                <a:spcPct val="90000"/>
-              </a:lnSpc>
-              <a:spcBef>
-                <a:spcPct val="0"/>
-              </a:spcBef>
-              <a:buNone/>
-              <a:defRPr sz="4400" kern="1200">
-                <a:solidFill>
-                  <a:schemeClr val="tx1"/>
-                </a:solidFill>
-                <a:latin typeface="+mj-lt"/>
-                <a:ea typeface="+mj-ea"/>
-                <a:cs typeface="+mj-cs"/>
-              </a:defRPr>
-            </a:lvl1pPr>
-          </a:lstStyle>
-          <a:p>
-            <a:pPr algn="ctr"/>
-            <a:r>
-              <a:rPr lang="en-US" sz="2400" b="1" dirty="0">
-                <a:latin typeface="Arial" panose="020B0604020202020204" pitchFamily="34" charset="0"/>
-                <a:cs typeface="Arial" panose="020B0604020202020204" pitchFamily="34" charset="0"/>
-              </a:rPr>
-              <a:t>System-controlled encoding</a:t>
-            </a:r>
-          </a:p>
-        </p:txBody>
-      </p:sp>
-      <p:sp>
-        <p:nvSpPr>
-          <p:cNvPr id="12" name="Title 1">
-            <a:extLst>
-              <a:ext uri="{FF2B5EF4-FFF2-40B4-BE49-F238E27FC236}">
-                <a16:creationId xmlns:a16="http://schemas.microsoft.com/office/drawing/2014/main" id="{13C8A825-95D6-4F49-ADB3-3DF273F8FEAB}"/>
-              </a:ext>
-            </a:extLst>
-          </p:cNvPr>
-          <p:cNvSpPr txBox="1">
-            <a:spLocks/>
-          </p:cNvSpPr>
-          <p:nvPr/>
-        </p:nvSpPr>
-        <p:spPr>
-          <a:xfrm>
-            <a:off x="7069841" y="386321"/>
-            <a:ext cx="4648667" cy="568996"/>
-          </a:xfrm>
-          <a:prstGeom prst="rect">
-            <a:avLst/>
-          </a:prstGeom>
-        </p:spPr>
-        <p:txBody>
-          <a:bodyPr vert="horz" lIns="91440" tIns="45720" rIns="91440" bIns="45720" rtlCol="0" anchor="ctr">
-            <a:normAutofit fontScale="92500"/>
-          </a:bodyPr>
-          <a:lstStyle>
-            <a:lvl1pPr algn="l" defTabSz="914400" rtl="0" eaLnBrk="1" latinLnBrk="0" hangingPunct="1">
-              <a:lnSpc>
-                <a:spcPct val="90000"/>
-              </a:lnSpc>
-              <a:spcBef>
-                <a:spcPct val="0"/>
-              </a:spcBef>
-              <a:buNone/>
-              <a:defRPr sz="4400" kern="1200">
-                <a:solidFill>
-                  <a:schemeClr val="tx1"/>
-                </a:solidFill>
-                <a:latin typeface="+mj-lt"/>
-                <a:ea typeface="+mj-ea"/>
-                <a:cs typeface="+mj-cs"/>
-              </a:defRPr>
-            </a:lvl1pPr>
-          </a:lstStyle>
-          <a:p>
-            <a:pPr algn="ctr"/>
-            <a:r>
-              <a:rPr lang="en-US" sz="2400" b="1" dirty="0">
-                <a:latin typeface="Arial" panose="020B0604020202020204" pitchFamily="34" charset="0"/>
-                <a:cs typeface="Arial" panose="020B0604020202020204" pitchFamily="34" charset="0"/>
-              </a:rPr>
-              <a:t>Apparatus-controlled encoding</a:t>
-            </a:r>
-          </a:p>
-        </p:txBody>
-      </p:sp>
-      <p:cxnSp>
-        <p:nvCxnSpPr>
-          <p:cNvPr id="15" name="Straight Connector 14">
-            <a:extLst>
-              <a:ext uri="{FF2B5EF4-FFF2-40B4-BE49-F238E27FC236}">
-                <a16:creationId xmlns:a16="http://schemas.microsoft.com/office/drawing/2014/main" id="{A6E426EC-CBA4-85DF-E7E6-F3A8745B2081}"/>
-              </a:ext>
-            </a:extLst>
-          </p:cNvPr>
-          <p:cNvCxnSpPr>
-            <a:cxnSpLocks/>
-          </p:cNvCxnSpPr>
-          <p:nvPr/>
-        </p:nvCxnSpPr>
-        <p:spPr>
-          <a:xfrm>
-            <a:off x="6347791" y="616226"/>
-            <a:ext cx="0" cy="5855453"/>
-          </a:xfrm>
-          <a:prstGeom prst="line">
-            <a:avLst/>
-          </a:prstGeom>
-        </p:spPr>
-        <p:style>
-          <a:lnRef idx="2">
-            <a:schemeClr val="dk1"/>
-          </a:lnRef>
-          <a:fillRef idx="0">
-            <a:schemeClr val="dk1"/>
-          </a:fillRef>
-          <a:effectRef idx="1">
-            <a:schemeClr val="dk1"/>
-          </a:effectRef>
-          <a:fontRef idx="minor">
-            <a:schemeClr val="tx1"/>
-          </a:fontRef>
-        </p:style>
-      </p:cxnSp>
     </p:spTree>
     <p:extLst>
       <p:ext uri="{BB962C8B-B14F-4D97-AF65-F5344CB8AC3E}">
-        <p14:creationId xmlns:p14="http://schemas.microsoft.com/office/powerpoint/2010/main" val="2089002917"/>
+        <p14:creationId xmlns:p14="http://schemas.microsoft.com/office/powerpoint/2010/main" val="3632482633"/>
       </p:ext>
     </p:extLst>
   </p:cSld>
@@ -4103,10 +4006,10 @@
       </p:grpSpPr>
       <p:pic>
         <p:nvPicPr>
-          <p:cNvPr id="3" name="Picture 2">
-            <a:extLst>
-              <a:ext uri="{FF2B5EF4-FFF2-40B4-BE49-F238E27FC236}">
-                <a16:creationId xmlns:a16="http://schemas.microsoft.com/office/drawing/2014/main" id="{6DEA4063-E1F4-CEF2-A100-0D42CD95AE79}"/>
+          <p:cNvPr id="7" name="Picture 6">
+            <a:extLst>
+              <a:ext uri="{FF2B5EF4-FFF2-40B4-BE49-F238E27FC236}">
+                <a16:creationId xmlns:a16="http://schemas.microsoft.com/office/drawing/2014/main" id="{87DE6963-1EDC-7C02-FB7E-B03678E9C47C}"/>
               </a:ext>
             </a:extLst>
           </p:cNvPr>
@@ -4123,20 +4026,78 @@
         </p:blipFill>
         <p:spPr>
           <a:xfrm>
-            <a:off x="2013500" y="1602446"/>
-            <a:ext cx="4294776" cy="3653105"/>
+            <a:off x="6926430" y="685800"/>
+            <a:ext cx="3194684" cy="2743200"/>
           </a:xfrm>
           <a:prstGeom prst="rect">
             <a:avLst/>
           </a:prstGeom>
         </p:spPr>
       </p:pic>
+      <p:sp>
+        <p:nvSpPr>
+          <p:cNvPr id="10" name="Title 1">
+            <a:extLst>
+              <a:ext uri="{FF2B5EF4-FFF2-40B4-BE49-F238E27FC236}">
+                <a16:creationId xmlns:a16="http://schemas.microsoft.com/office/drawing/2014/main" id="{4A4A4242-4422-208D-80EF-5F39464A63EF}"/>
+              </a:ext>
+            </a:extLst>
+          </p:cNvPr>
+          <p:cNvSpPr txBox="1">
+            <a:spLocks/>
+          </p:cNvSpPr>
+          <p:nvPr/>
+        </p:nvSpPr>
+        <p:spPr>
+          <a:xfrm>
+            <a:off x="812226" y="401302"/>
+            <a:ext cx="5078365" cy="568996"/>
+          </a:xfrm>
+          <a:prstGeom prst="rect">
+            <a:avLst/>
+          </a:prstGeom>
+        </p:spPr>
+        <p:txBody>
+          <a:bodyPr vert="horz" lIns="91440" tIns="45720" rIns="91440" bIns="45720" rtlCol="0" anchor="ctr">
+            <a:normAutofit fontScale="85000" lnSpcReduction="10000"/>
+          </a:bodyPr>
+          <a:lstStyle>
+            <a:lvl1pPr algn="l" defTabSz="914400" rtl="0" eaLnBrk="1" latinLnBrk="0" hangingPunct="1">
+              <a:lnSpc>
+                <a:spcPct val="90000"/>
+              </a:lnSpc>
+              <a:spcBef>
+                <a:spcPct val="0"/>
+              </a:spcBef>
+              <a:buNone/>
+              <a:defRPr sz="4400" kern="1200">
+                <a:solidFill>
+                  <a:schemeClr val="tx1"/>
+                </a:solidFill>
+                <a:latin typeface="+mj-lt"/>
+                <a:ea typeface="+mj-ea"/>
+                <a:cs typeface="+mj-cs"/>
+              </a:defRPr>
+            </a:lvl1pPr>
+          </a:lstStyle>
+          <a:p>
+            <a:pPr algn="ctr"/>
+            <a:r>
+              <a:rPr lang="en-US" sz="2800" b="1" dirty="0">
+                <a:latin typeface="Arial" panose="020B0604020202020204" pitchFamily="34" charset="0"/>
+                <a:cs typeface="Arial" panose="020B0604020202020204" pitchFamily="34" charset="0"/>
+              </a:rPr>
+              <a:t>Apparatus-controlled encoding</a:t>
+            </a:r>
+          </a:p>
+        </p:txBody>
+      </p:sp>
       <p:pic>
         <p:nvPicPr>
-          <p:cNvPr id="5" name="Picture 4">
-            <a:extLst>
-              <a:ext uri="{FF2B5EF4-FFF2-40B4-BE49-F238E27FC236}">
-                <a16:creationId xmlns:a16="http://schemas.microsoft.com/office/drawing/2014/main" id="{565970F3-E2E5-1990-7A67-8CE38DAB4CAB}"/>
+          <p:cNvPr id="11" name="Picture 10">
+            <a:extLst>
+              <a:ext uri="{FF2B5EF4-FFF2-40B4-BE49-F238E27FC236}">
+                <a16:creationId xmlns:a16="http://schemas.microsoft.com/office/drawing/2014/main" id="{3B783A23-3673-3BAA-8CE4-0A40DCCC7A03}"/>
               </a:ext>
             </a:extLst>
           </p:cNvPr>
@@ -4153,102 +4114,74 @@
         </p:blipFill>
         <p:spPr>
           <a:xfrm>
-            <a:off x="7138047" y="1602447"/>
-            <a:ext cx="4398637" cy="3653105"/>
+            <a:off x="1212515" y="3814995"/>
+            <a:ext cx="3789892" cy="2743200"/>
           </a:xfrm>
           <a:prstGeom prst="rect">
             <a:avLst/>
           </a:prstGeom>
         </p:spPr>
       </p:pic>
-      <p:sp>
-        <p:nvSpPr>
-          <p:cNvPr id="6" name="Title 1">
-            <a:extLst>
-              <a:ext uri="{FF2B5EF4-FFF2-40B4-BE49-F238E27FC236}">
-                <a16:creationId xmlns:a16="http://schemas.microsoft.com/office/drawing/2014/main" id="{A22A1129-C074-8D71-19F4-E5CE9BBC9913}"/>
-              </a:ext>
-            </a:extLst>
-          </p:cNvPr>
-          <p:cNvSpPr txBox="1">
-            <a:spLocks/>
-          </p:cNvSpPr>
+      <p:pic>
+        <p:nvPicPr>
+          <p:cNvPr id="12" name="Picture 11">
+            <a:extLst>
+              <a:ext uri="{FF2B5EF4-FFF2-40B4-BE49-F238E27FC236}">
+                <a16:creationId xmlns:a16="http://schemas.microsoft.com/office/drawing/2014/main" id="{91241F12-D2FB-346F-1C9B-AD145910FC6D}"/>
+              </a:ext>
+            </a:extLst>
+          </p:cNvPr>
+          <p:cNvPicPr>
+            <a:picLocks noChangeAspect="1"/>
+          </p:cNvPicPr>
           <p:nvPr/>
-        </p:nvSpPr>
+        </p:nvPicPr>
+        <p:blipFill>
+          <a:blip r:embed="rId4"/>
+          <a:stretch>
+            <a:fillRect/>
+          </a:stretch>
+        </p:blipFill>
         <p:spPr>
           <a:xfrm>
-            <a:off x="4432417" y="333855"/>
-            <a:ext cx="4343673" cy="568996"/>
+            <a:off x="1037719" y="1131756"/>
+            <a:ext cx="4139485" cy="2743200"/>
           </a:xfrm>
           <a:prstGeom prst="rect">
             <a:avLst/>
           </a:prstGeom>
         </p:spPr>
-        <p:txBody>
-          <a:bodyPr vert="horz" lIns="91440" tIns="45720" rIns="91440" bIns="45720" rtlCol="0" anchor="ctr">
-            <a:normAutofit/>
-          </a:bodyPr>
-          <a:lstStyle>
-            <a:lvl1pPr algn="l" defTabSz="914400" rtl="0" eaLnBrk="1" latinLnBrk="0" hangingPunct="1">
-              <a:lnSpc>
-                <a:spcPct val="90000"/>
-              </a:lnSpc>
-              <a:spcBef>
-                <a:spcPct val="0"/>
-              </a:spcBef>
-              <a:buNone/>
-              <a:defRPr sz="4400" kern="1200">
-                <a:solidFill>
-                  <a:schemeClr val="tx1"/>
-                </a:solidFill>
-                <a:latin typeface="+mj-lt"/>
-                <a:ea typeface="+mj-ea"/>
-                <a:cs typeface="+mj-cs"/>
-              </a:defRPr>
-            </a:lvl1pPr>
-          </a:lstStyle>
-          <a:p>
-            <a:pPr algn="ctr"/>
-            <a:r>
-              <a:rPr lang="en-US" sz="2400" b="1" dirty="0">
-                <a:latin typeface="Arial" panose="020B0604020202020204" pitchFamily="34" charset="0"/>
-                <a:cs typeface="Arial" panose="020B0604020202020204" pitchFamily="34" charset="0"/>
-              </a:rPr>
-              <a:t>System-controlled encoding</a:t>
-            </a:r>
-          </a:p>
-        </p:txBody>
-      </p:sp>
-    </p:spTree>
-    <p:extLst>
-      <p:ext uri="{BB962C8B-B14F-4D97-AF65-F5344CB8AC3E}">
-        <p14:creationId xmlns:p14="http://schemas.microsoft.com/office/powerpoint/2010/main" val="3632482633"/>
-      </p:ext>
-    </p:extLst>
-  </p:cSld>
-  <p:clrMapOvr>
-    <a:masterClrMapping/>
-  </p:clrMapOvr>
-</p:sld>
-</file>
-
-<file path=ppt/slides/slide4.xml><?xml version="1.0" encoding="utf-8"?>
-<p:sld xmlns:a="http://schemas.openxmlformats.org/drawingml/2006/main" xmlns:r="http://schemas.openxmlformats.org/officeDocument/2006/relationships" xmlns:p="http://schemas.openxmlformats.org/presentationml/2006/main">
-  <p:cSld>
-    <p:spTree>
-      <p:nvGrpSpPr>
-        <p:cNvPr id="1" name=""/>
-        <p:cNvGrpSpPr/>
-        <p:nvPr/>
-      </p:nvGrpSpPr>
-      <p:grpSpPr>
-        <a:xfrm>
-          <a:off x="0" y="0"/>
-          <a:ext cx="0" cy="0"/>
-          <a:chOff x="0" y="0"/>
-          <a:chExt cx="0" cy="0"/>
-        </a:xfrm>
-      </p:grpSpPr>
+      </p:pic>
+      <p:pic>
+        <p:nvPicPr>
+          <p:cNvPr id="3" name="Picture 2">
+            <a:extLst>
+              <a:ext uri="{FF2B5EF4-FFF2-40B4-BE49-F238E27FC236}">
+                <a16:creationId xmlns:a16="http://schemas.microsoft.com/office/drawing/2014/main" id="{299819F6-8B01-98FE-F164-1DD020188640}"/>
+              </a:ext>
+            </a:extLst>
+          </p:cNvPr>
+          <p:cNvPicPr>
+            <a:picLocks noChangeAspect="1"/>
+          </p:cNvPicPr>
+          <p:nvPr/>
+        </p:nvPicPr>
+        <p:blipFill>
+          <a:blip r:embed="rId5"/>
+          <a:stretch>
+            <a:fillRect/>
+          </a:stretch>
+        </p:blipFill>
+        <p:spPr>
+          <a:xfrm>
+            <a:off x="6818077" y="3874956"/>
+            <a:ext cx="3303037" cy="2743200"/>
+          </a:xfrm>
+          <a:prstGeom prst="rect">
+            <a:avLst/>
+          </a:prstGeom>
+        </p:spPr>
+      </p:pic>
     </p:spTree>
     <p:extLst>
       <p:ext uri="{BB962C8B-B14F-4D97-AF65-F5344CB8AC3E}">
